--- a/docs/media/destination-com-media-kit.pptx
+++ b/docs/media/destination-com-media-kit.pptx
@@ -4677,15 +4677,22 @@
               <a:buNone/>
             </a:pPr>
             <a:r>
-              <a:rPr lang="en-US" sz="1200" b="1" dirty="0">
+              <a:rPr lang="en-US" sz="1200" b="1" u="sng" dirty="0">
                 <a:solidFill>
                   <a:srgbClr val="F2EDE4"/>
                 </a:solidFill>
                 <a:latin typeface="Calibri" pitchFamily="34" charset="0"/>
                 <a:ea typeface="Calibri" pitchFamily="34" charset="-122"/>
                 <a:cs typeface="Calibri" pitchFamily="34" charset="-120"/>
-              </a:rPr>
-              <a:t>advertise@destination.com</a:t>
+                <a:hlinkClick r:id="rId1" invalidUrl="" action="" tgtFrame="" tooltip="" history="1" highlightClick="0" endSnd="0">
+                  <a:extLst>
+                    <a:ext uri="{A12FA001-AC4F-418D-AE19-62706E023703}">
+                      <ahyp:hlinkClr xmlns:ahyp="http://schemas.microsoft.com/office/drawing/2018/hyperlinkcolor" val="tx"/>
+                    </a:ext>
+                  </a:extLst>
+                </a:hlinkClick>
+              </a:rPr>
+              <a:t>info@pgammedia.com</a:t>
             </a:r>
             <a:endParaRPr lang="en-US" sz="1200" dirty="0"/>
           </a:p>
